--- a/output/combat-mindset-identity.pptx
+++ b/output/combat-mindset-identity.pptx
@@ -1070,7 +1070,7 @@
         <p:spPr>
           <a:xfrm>
             <a:off x="457200" y="347472"/>
-            <a:ext cx="1481328" cy="358445"/>
+            <a:ext cx="1481328" cy="338328"/>
           </a:xfrm>
           <a:prstGeom prst="rect">
             <a:avLst/>
@@ -2768,7 +2768,7 @@
         <p:spPr>
           <a:xfrm>
             <a:off x="457200" y="347472"/>
-            <a:ext cx="1481328" cy="358445"/>
+            <a:ext cx="1481328" cy="338328"/>
           </a:xfrm>
           <a:prstGeom prst="rect">
             <a:avLst/>
@@ -3668,7 +3668,7 @@
         <p:spPr>
           <a:xfrm>
             <a:off x="731520" y="4261104"/>
-            <a:ext cx="1481328" cy="358445"/>
+            <a:ext cx="1481328" cy="338328"/>
           </a:xfrm>
           <a:prstGeom prst="rect">
             <a:avLst/>
@@ -3829,7 +3829,7 @@
         <p:spPr>
           <a:xfrm>
             <a:off x="4754880" y="4169664"/>
-            <a:ext cx="1225296" cy="296266"/>
+            <a:ext cx="1225296" cy="279806"/>
           </a:xfrm>
           <a:prstGeom prst="rect">
             <a:avLst/>
@@ -5573,7 +5573,7 @@
         <p:spPr>
           <a:xfrm>
             <a:off x="457200" y="347472"/>
-            <a:ext cx="1481328" cy="358445"/>
+            <a:ext cx="1481328" cy="338328"/>
           </a:xfrm>
           <a:prstGeom prst="rect">
             <a:avLst/>
@@ -5896,7 +5896,7 @@
         <p:spPr>
           <a:xfrm>
             <a:off x="640080" y="2084832"/>
-            <a:ext cx="859536" cy="207569"/>
+            <a:ext cx="859536" cy="196596"/>
           </a:xfrm>
           <a:prstGeom prst="rect">
             <a:avLst/>
@@ -6172,7 +6172,7 @@
         <p:spPr>
           <a:xfrm>
             <a:off x="3108960" y="2066544"/>
-            <a:ext cx="969264" cy="234086"/>
+            <a:ext cx="969264" cy="221285"/>
           </a:xfrm>
           <a:prstGeom prst="rect">
             <a:avLst/>
@@ -6855,7 +6855,7 @@
         <p:spPr>
           <a:xfrm>
             <a:off x="4223385" y="5916168"/>
-            <a:ext cx="804672" cy="194767"/>
+            <a:ext cx="804672" cy="183794"/>
           </a:xfrm>
           <a:prstGeom prst="rect">
             <a:avLst/>
